--- a/lectures/Day_2_15042026.pptx
+++ b/lectures/Day_2_15042026.pptx
@@ -320,7 +320,7 @@
           <a:p>
             <a:fld id="{B3530E6F-0040-4942-9F69-210A540F34BF}" type="datetimeFigureOut">
               <a:rPr lang="en-GB" smtClean="0"/>
-              <a:t>10/04/2026</a:t>
+              <a:t>14/04/2026</a:t>
             </a:fld>
             <a:endParaRPr lang="en-GB"/>
           </a:p>
@@ -998,7 +998,7 @@
           <a:p>
             <a:fld id="{49805E33-E083-8148-A935-58064E7C40E0}" type="datetimeFigureOut">
               <a:rPr lang="en-GB" smtClean="0"/>
-              <a:t>02/04/2026</a:t>
+              <a:t>14/04/2026</a:t>
             </a:fld>
             <a:endParaRPr lang="en-GB"/>
           </a:p>
@@ -1198,7 +1198,7 @@
           <a:p>
             <a:fld id="{49805E33-E083-8148-A935-58064E7C40E0}" type="datetimeFigureOut">
               <a:rPr lang="en-GB" smtClean="0"/>
-              <a:t>02/04/2026</a:t>
+              <a:t>14/04/2026</a:t>
             </a:fld>
             <a:endParaRPr lang="en-GB"/>
           </a:p>
@@ -1408,7 +1408,7 @@
           <a:p>
             <a:fld id="{49805E33-E083-8148-A935-58064E7C40E0}" type="datetimeFigureOut">
               <a:rPr lang="en-GB" smtClean="0"/>
-              <a:t>02/04/2026</a:t>
+              <a:t>14/04/2026</a:t>
             </a:fld>
             <a:endParaRPr lang="en-GB"/>
           </a:p>
@@ -1608,7 +1608,7 @@
           <a:p>
             <a:fld id="{49805E33-E083-8148-A935-58064E7C40E0}" type="datetimeFigureOut">
               <a:rPr lang="en-GB" smtClean="0"/>
-              <a:t>02/04/2026</a:t>
+              <a:t>14/04/2026</a:t>
             </a:fld>
             <a:endParaRPr lang="en-GB"/>
           </a:p>
@@ -1884,7 +1884,7 @@
           <a:p>
             <a:fld id="{49805E33-E083-8148-A935-58064E7C40E0}" type="datetimeFigureOut">
               <a:rPr lang="en-GB" smtClean="0"/>
-              <a:t>02/04/2026</a:t>
+              <a:t>14/04/2026</a:t>
             </a:fld>
             <a:endParaRPr lang="en-GB"/>
           </a:p>
@@ -2152,7 +2152,7 @@
           <a:p>
             <a:fld id="{49805E33-E083-8148-A935-58064E7C40E0}" type="datetimeFigureOut">
               <a:rPr lang="en-GB" smtClean="0"/>
-              <a:t>02/04/2026</a:t>
+              <a:t>14/04/2026</a:t>
             </a:fld>
             <a:endParaRPr lang="en-GB"/>
           </a:p>
@@ -2567,7 +2567,7 @@
           <a:p>
             <a:fld id="{49805E33-E083-8148-A935-58064E7C40E0}" type="datetimeFigureOut">
               <a:rPr lang="en-GB" smtClean="0"/>
-              <a:t>02/04/2026</a:t>
+              <a:t>14/04/2026</a:t>
             </a:fld>
             <a:endParaRPr lang="en-GB"/>
           </a:p>
@@ -2709,7 +2709,7 @@
           <a:p>
             <a:fld id="{49805E33-E083-8148-A935-58064E7C40E0}" type="datetimeFigureOut">
               <a:rPr lang="en-GB" smtClean="0"/>
-              <a:t>02/04/2026</a:t>
+              <a:t>14/04/2026</a:t>
             </a:fld>
             <a:endParaRPr lang="en-GB"/>
           </a:p>
@@ -2822,7 +2822,7 @@
           <a:p>
             <a:fld id="{49805E33-E083-8148-A935-58064E7C40E0}" type="datetimeFigureOut">
               <a:rPr lang="en-GB" smtClean="0"/>
-              <a:t>02/04/2026</a:t>
+              <a:t>14/04/2026</a:t>
             </a:fld>
             <a:endParaRPr lang="en-GB"/>
           </a:p>
@@ -3135,7 +3135,7 @@
           <a:p>
             <a:fld id="{49805E33-E083-8148-A935-58064E7C40E0}" type="datetimeFigureOut">
               <a:rPr lang="en-GB" smtClean="0"/>
-              <a:t>02/04/2026</a:t>
+              <a:t>14/04/2026</a:t>
             </a:fld>
             <a:endParaRPr lang="en-GB"/>
           </a:p>
@@ -3424,7 +3424,7 @@
           <a:p>
             <a:fld id="{49805E33-E083-8148-A935-58064E7C40E0}" type="datetimeFigureOut">
               <a:rPr lang="en-GB" smtClean="0"/>
-              <a:t>02/04/2026</a:t>
+              <a:t>14/04/2026</a:t>
             </a:fld>
             <a:endParaRPr lang="en-GB"/>
           </a:p>
@@ -3667,7 +3667,7 @@
           <a:p>
             <a:fld id="{49805E33-E083-8148-A935-58064E7C40E0}" type="datetimeFigureOut">
               <a:rPr lang="en-GB" smtClean="0"/>
-              <a:t>02/04/2026</a:t>
+              <a:t>14/04/2026</a:t>
             </a:fld>
             <a:endParaRPr lang="en-GB"/>
           </a:p>
@@ -4406,6 +4406,36 @@
           </a:p>
         </p:txBody>
       </p:sp>
+      <p:pic>
+        <p:nvPicPr>
+          <p:cNvPr id="4" name="Grafik 3">
+            <a:extLst>
+              <a:ext uri="{FF2B5EF4-FFF2-40B4-BE49-F238E27FC236}">
+                <a16:creationId xmlns:a16="http://schemas.microsoft.com/office/drawing/2014/main" id="{7095C530-306C-3216-EEAE-EEFADF940BFD}"/>
+              </a:ext>
+            </a:extLst>
+          </p:cNvPr>
+          <p:cNvPicPr>
+            <a:picLocks noChangeAspect="1"/>
+          </p:cNvPicPr>
+          <p:nvPr/>
+        </p:nvPicPr>
+        <p:blipFill>
+          <a:blip r:embed="rId3"/>
+          <a:stretch>
+            <a:fillRect/>
+          </a:stretch>
+        </p:blipFill>
+        <p:spPr>
+          <a:xfrm>
+            <a:off x="6411135" y="2740575"/>
+            <a:ext cx="5780865" cy="4117425"/>
+          </a:xfrm>
+          <a:prstGeom prst="rect">
+            <a:avLst/>
+          </a:prstGeom>
+        </p:spPr>
+      </p:pic>
     </p:spTree>
     <p:extLst>
       <p:ext uri="{BB962C8B-B14F-4D97-AF65-F5344CB8AC3E}">
@@ -4416,6 +4446,480 @@
   <p:clrMapOvr>
     <a:masterClrMapping/>
   </p:clrMapOvr>
+  <p:timing>
+    <p:tnLst>
+      <p:par>
+        <p:cTn id="1" dur="indefinite" restart="never" nodeType="tmRoot">
+          <p:childTnLst>
+            <p:seq concurrent="1" nextAc="seek">
+              <p:cTn id="2" dur="indefinite" nodeType="mainSeq">
+                <p:childTnLst>
+                  <p:par>
+                    <p:cTn id="3" fill="hold">
+                      <p:stCondLst>
+                        <p:cond delay="indefinite"/>
+                      </p:stCondLst>
+                      <p:childTnLst>
+                        <p:par>
+                          <p:cTn id="4" fill="hold">
+                            <p:stCondLst>
+                              <p:cond delay="0"/>
+                            </p:stCondLst>
+                            <p:childTnLst>
+                              <p:par>
+                                <p:cTn id="5" presetID="1" presetClass="entr" presetSubtype="0" fill="hold" grpId="0" nodeType="clickEffect">
+                                  <p:stCondLst>
+                                    <p:cond delay="0"/>
+                                  </p:stCondLst>
+                                  <p:childTnLst>
+                                    <p:set>
+                                      <p:cBhvr>
+                                        <p:cTn id="6" dur="1" fill="hold">
+                                          <p:stCondLst>
+                                            <p:cond delay="0"/>
+                                          </p:stCondLst>
+                                        </p:cTn>
+                                        <p:tgtEl>
+                                          <p:spTgt spid="3">
+                                            <p:txEl>
+                                              <p:pRg st="0" end="0"/>
+                                            </p:txEl>
+                                          </p:spTgt>
+                                        </p:tgtEl>
+                                        <p:attrNameLst>
+                                          <p:attrName>style.visibility</p:attrName>
+                                        </p:attrNameLst>
+                                      </p:cBhvr>
+                                      <p:to>
+                                        <p:strVal val="visible"/>
+                                      </p:to>
+                                    </p:set>
+                                  </p:childTnLst>
+                                </p:cTn>
+                              </p:par>
+                            </p:childTnLst>
+                          </p:cTn>
+                        </p:par>
+                      </p:childTnLst>
+                    </p:cTn>
+                  </p:par>
+                  <p:par>
+                    <p:cTn id="7" fill="hold">
+                      <p:stCondLst>
+                        <p:cond delay="indefinite"/>
+                      </p:stCondLst>
+                      <p:childTnLst>
+                        <p:par>
+                          <p:cTn id="8" fill="hold">
+                            <p:stCondLst>
+                              <p:cond delay="0"/>
+                            </p:stCondLst>
+                            <p:childTnLst>
+                              <p:par>
+                                <p:cTn id="9" presetID="1" presetClass="entr" presetSubtype="0" fill="hold" grpId="0" nodeType="clickEffect">
+                                  <p:stCondLst>
+                                    <p:cond delay="0"/>
+                                  </p:stCondLst>
+                                  <p:childTnLst>
+                                    <p:set>
+                                      <p:cBhvr>
+                                        <p:cTn id="10" dur="1" fill="hold">
+                                          <p:stCondLst>
+                                            <p:cond delay="0"/>
+                                          </p:stCondLst>
+                                        </p:cTn>
+                                        <p:tgtEl>
+                                          <p:spTgt spid="3">
+                                            <p:txEl>
+                                              <p:pRg st="1" end="1"/>
+                                            </p:txEl>
+                                          </p:spTgt>
+                                        </p:tgtEl>
+                                        <p:attrNameLst>
+                                          <p:attrName>style.visibility</p:attrName>
+                                        </p:attrNameLst>
+                                      </p:cBhvr>
+                                      <p:to>
+                                        <p:strVal val="visible"/>
+                                      </p:to>
+                                    </p:set>
+                                  </p:childTnLst>
+                                </p:cTn>
+                              </p:par>
+                            </p:childTnLst>
+                          </p:cTn>
+                        </p:par>
+                      </p:childTnLst>
+                    </p:cTn>
+                  </p:par>
+                  <p:par>
+                    <p:cTn id="11" fill="hold">
+                      <p:stCondLst>
+                        <p:cond delay="indefinite"/>
+                      </p:stCondLst>
+                      <p:childTnLst>
+                        <p:par>
+                          <p:cTn id="12" fill="hold">
+                            <p:stCondLst>
+                              <p:cond delay="0"/>
+                            </p:stCondLst>
+                            <p:childTnLst>
+                              <p:par>
+                                <p:cTn id="13" presetID="1" presetClass="entr" presetSubtype="0" fill="hold" nodeType="clickEffect">
+                                  <p:stCondLst>
+                                    <p:cond delay="0"/>
+                                  </p:stCondLst>
+                                  <p:childTnLst>
+                                    <p:set>
+                                      <p:cBhvr>
+                                        <p:cTn id="14" dur="1" fill="hold">
+                                          <p:stCondLst>
+                                            <p:cond delay="0"/>
+                                          </p:stCondLst>
+                                        </p:cTn>
+                                        <p:tgtEl>
+                                          <p:spTgt spid="4"/>
+                                        </p:tgtEl>
+                                        <p:attrNameLst>
+                                          <p:attrName>style.visibility</p:attrName>
+                                        </p:attrNameLst>
+                                      </p:cBhvr>
+                                      <p:to>
+                                        <p:strVal val="visible"/>
+                                      </p:to>
+                                    </p:set>
+                                  </p:childTnLst>
+                                </p:cTn>
+                              </p:par>
+                            </p:childTnLst>
+                          </p:cTn>
+                        </p:par>
+                      </p:childTnLst>
+                    </p:cTn>
+                  </p:par>
+                  <p:par>
+                    <p:cTn id="15" fill="hold">
+                      <p:stCondLst>
+                        <p:cond delay="indefinite"/>
+                      </p:stCondLst>
+                      <p:childTnLst>
+                        <p:par>
+                          <p:cTn id="16" fill="hold">
+                            <p:stCondLst>
+                              <p:cond delay="0"/>
+                            </p:stCondLst>
+                            <p:childTnLst>
+                              <p:par>
+                                <p:cTn id="17" presetID="1" presetClass="exit" presetSubtype="0" fill="hold" nodeType="clickEffect">
+                                  <p:stCondLst>
+                                    <p:cond delay="0"/>
+                                  </p:stCondLst>
+                                  <p:childTnLst>
+                                    <p:set>
+                                      <p:cBhvr>
+                                        <p:cTn id="18" dur="1" fill="hold">
+                                          <p:stCondLst>
+                                            <p:cond delay="0"/>
+                                          </p:stCondLst>
+                                        </p:cTn>
+                                        <p:tgtEl>
+                                          <p:spTgt spid="4"/>
+                                        </p:tgtEl>
+                                        <p:attrNameLst>
+                                          <p:attrName>style.visibility</p:attrName>
+                                        </p:attrNameLst>
+                                      </p:cBhvr>
+                                      <p:to>
+                                        <p:strVal val="hidden"/>
+                                      </p:to>
+                                    </p:set>
+                                  </p:childTnLst>
+                                </p:cTn>
+                              </p:par>
+                              <p:par>
+                                <p:cTn id="19" presetID="1" presetClass="entr" presetSubtype="0" fill="hold" grpId="0" nodeType="withEffect">
+                                  <p:stCondLst>
+                                    <p:cond delay="0"/>
+                                  </p:stCondLst>
+                                  <p:childTnLst>
+                                    <p:set>
+                                      <p:cBhvr>
+                                        <p:cTn id="20" dur="1" fill="hold">
+                                          <p:stCondLst>
+                                            <p:cond delay="0"/>
+                                          </p:stCondLst>
+                                        </p:cTn>
+                                        <p:tgtEl>
+                                          <p:spTgt spid="3">
+                                            <p:txEl>
+                                              <p:pRg st="2" end="2"/>
+                                            </p:txEl>
+                                          </p:spTgt>
+                                        </p:tgtEl>
+                                        <p:attrNameLst>
+                                          <p:attrName>style.visibility</p:attrName>
+                                        </p:attrNameLst>
+                                      </p:cBhvr>
+                                      <p:to>
+                                        <p:strVal val="visible"/>
+                                      </p:to>
+                                    </p:set>
+                                  </p:childTnLst>
+                                </p:cTn>
+                              </p:par>
+                              <p:par>
+                                <p:cTn id="21" presetID="1" presetClass="entr" presetSubtype="0" fill="hold" grpId="0" nodeType="withEffect">
+                                  <p:stCondLst>
+                                    <p:cond delay="0"/>
+                                  </p:stCondLst>
+                                  <p:childTnLst>
+                                    <p:set>
+                                      <p:cBhvr>
+                                        <p:cTn id="22" dur="1" fill="hold">
+                                          <p:stCondLst>
+                                            <p:cond delay="0"/>
+                                          </p:stCondLst>
+                                        </p:cTn>
+                                        <p:tgtEl>
+                                          <p:spTgt spid="3">
+                                            <p:txEl>
+                                              <p:pRg st="3" end="3"/>
+                                            </p:txEl>
+                                          </p:spTgt>
+                                        </p:tgtEl>
+                                        <p:attrNameLst>
+                                          <p:attrName>style.visibility</p:attrName>
+                                        </p:attrNameLst>
+                                      </p:cBhvr>
+                                      <p:to>
+                                        <p:strVal val="visible"/>
+                                      </p:to>
+                                    </p:set>
+                                  </p:childTnLst>
+                                </p:cTn>
+                              </p:par>
+                              <p:par>
+                                <p:cTn id="23" presetID="1" presetClass="entr" presetSubtype="0" fill="hold" grpId="0" nodeType="withEffect">
+                                  <p:stCondLst>
+                                    <p:cond delay="0"/>
+                                  </p:stCondLst>
+                                  <p:childTnLst>
+                                    <p:set>
+                                      <p:cBhvr>
+                                        <p:cTn id="24" dur="1" fill="hold">
+                                          <p:stCondLst>
+                                            <p:cond delay="0"/>
+                                          </p:stCondLst>
+                                        </p:cTn>
+                                        <p:tgtEl>
+                                          <p:spTgt spid="3">
+                                            <p:txEl>
+                                              <p:pRg st="4" end="4"/>
+                                            </p:txEl>
+                                          </p:spTgt>
+                                        </p:tgtEl>
+                                        <p:attrNameLst>
+                                          <p:attrName>style.visibility</p:attrName>
+                                        </p:attrNameLst>
+                                      </p:cBhvr>
+                                      <p:to>
+                                        <p:strVal val="visible"/>
+                                      </p:to>
+                                    </p:set>
+                                  </p:childTnLst>
+                                </p:cTn>
+                              </p:par>
+                              <p:par>
+                                <p:cTn id="25" presetID="1" presetClass="entr" presetSubtype="0" fill="hold" grpId="0" nodeType="withEffect">
+                                  <p:stCondLst>
+                                    <p:cond delay="0"/>
+                                  </p:stCondLst>
+                                  <p:childTnLst>
+                                    <p:set>
+                                      <p:cBhvr>
+                                        <p:cTn id="26" dur="1" fill="hold">
+                                          <p:stCondLst>
+                                            <p:cond delay="0"/>
+                                          </p:stCondLst>
+                                        </p:cTn>
+                                        <p:tgtEl>
+                                          <p:spTgt spid="3">
+                                            <p:txEl>
+                                              <p:pRg st="5" end="5"/>
+                                            </p:txEl>
+                                          </p:spTgt>
+                                        </p:tgtEl>
+                                        <p:attrNameLst>
+                                          <p:attrName>style.visibility</p:attrName>
+                                        </p:attrNameLst>
+                                      </p:cBhvr>
+                                      <p:to>
+                                        <p:strVal val="visible"/>
+                                      </p:to>
+                                    </p:set>
+                                  </p:childTnLst>
+                                </p:cTn>
+                              </p:par>
+                              <p:par>
+                                <p:cTn id="27" presetID="1" presetClass="entr" presetSubtype="0" fill="hold" grpId="0" nodeType="withEffect">
+                                  <p:stCondLst>
+                                    <p:cond delay="0"/>
+                                  </p:stCondLst>
+                                  <p:childTnLst>
+                                    <p:set>
+                                      <p:cBhvr>
+                                        <p:cTn id="28" dur="1" fill="hold">
+                                          <p:stCondLst>
+                                            <p:cond delay="0"/>
+                                          </p:stCondLst>
+                                        </p:cTn>
+                                        <p:tgtEl>
+                                          <p:spTgt spid="3">
+                                            <p:txEl>
+                                              <p:pRg st="6" end="6"/>
+                                            </p:txEl>
+                                          </p:spTgt>
+                                        </p:tgtEl>
+                                        <p:attrNameLst>
+                                          <p:attrName>style.visibility</p:attrName>
+                                        </p:attrNameLst>
+                                      </p:cBhvr>
+                                      <p:to>
+                                        <p:strVal val="visible"/>
+                                      </p:to>
+                                    </p:set>
+                                  </p:childTnLst>
+                                </p:cTn>
+                              </p:par>
+                            </p:childTnLst>
+                          </p:cTn>
+                        </p:par>
+                      </p:childTnLst>
+                    </p:cTn>
+                  </p:par>
+                  <p:par>
+                    <p:cTn id="29" fill="hold">
+                      <p:stCondLst>
+                        <p:cond delay="indefinite"/>
+                      </p:stCondLst>
+                      <p:childTnLst>
+                        <p:par>
+                          <p:cTn id="30" fill="hold">
+                            <p:stCondLst>
+                              <p:cond delay="0"/>
+                            </p:stCondLst>
+                            <p:childTnLst>
+                              <p:par>
+                                <p:cTn id="31" presetID="1" presetClass="entr" presetSubtype="0" fill="hold" grpId="0" nodeType="clickEffect">
+                                  <p:stCondLst>
+                                    <p:cond delay="0"/>
+                                  </p:stCondLst>
+                                  <p:childTnLst>
+                                    <p:set>
+                                      <p:cBhvr>
+                                        <p:cTn id="32" dur="1" fill="hold">
+                                          <p:stCondLst>
+                                            <p:cond delay="0"/>
+                                          </p:stCondLst>
+                                        </p:cTn>
+                                        <p:tgtEl>
+                                          <p:spTgt spid="3">
+                                            <p:txEl>
+                                              <p:pRg st="7" end="7"/>
+                                            </p:txEl>
+                                          </p:spTgt>
+                                        </p:tgtEl>
+                                        <p:attrNameLst>
+                                          <p:attrName>style.visibility</p:attrName>
+                                        </p:attrNameLst>
+                                      </p:cBhvr>
+                                      <p:to>
+                                        <p:strVal val="visible"/>
+                                      </p:to>
+                                    </p:set>
+                                  </p:childTnLst>
+                                </p:cTn>
+                              </p:par>
+                            </p:childTnLst>
+                          </p:cTn>
+                        </p:par>
+                      </p:childTnLst>
+                    </p:cTn>
+                  </p:par>
+                  <p:par>
+                    <p:cTn id="33" fill="hold">
+                      <p:stCondLst>
+                        <p:cond delay="indefinite"/>
+                      </p:stCondLst>
+                      <p:childTnLst>
+                        <p:par>
+                          <p:cTn id="34" fill="hold">
+                            <p:stCondLst>
+                              <p:cond delay="0"/>
+                            </p:stCondLst>
+                            <p:childTnLst>
+                              <p:par>
+                                <p:cTn id="35" presetID="1" presetClass="entr" presetSubtype="0" fill="hold" grpId="0" nodeType="clickEffect">
+                                  <p:stCondLst>
+                                    <p:cond delay="0"/>
+                                  </p:stCondLst>
+                                  <p:childTnLst>
+                                    <p:set>
+                                      <p:cBhvr>
+                                        <p:cTn id="36" dur="1" fill="hold">
+                                          <p:stCondLst>
+                                            <p:cond delay="0"/>
+                                          </p:stCondLst>
+                                        </p:cTn>
+                                        <p:tgtEl>
+                                          <p:spTgt spid="3">
+                                            <p:txEl>
+                                              <p:pRg st="8" end="8"/>
+                                            </p:txEl>
+                                          </p:spTgt>
+                                        </p:tgtEl>
+                                        <p:attrNameLst>
+                                          <p:attrName>style.visibility</p:attrName>
+                                        </p:attrNameLst>
+                                      </p:cBhvr>
+                                      <p:to>
+                                        <p:strVal val="visible"/>
+                                      </p:to>
+                                    </p:set>
+                                  </p:childTnLst>
+                                </p:cTn>
+                              </p:par>
+                            </p:childTnLst>
+                          </p:cTn>
+                        </p:par>
+                      </p:childTnLst>
+                    </p:cTn>
+                  </p:par>
+                </p:childTnLst>
+              </p:cTn>
+              <p:prevCondLst>
+                <p:cond evt="onPrev" delay="0">
+                  <p:tgtEl>
+                    <p:sldTgt/>
+                  </p:tgtEl>
+                </p:cond>
+              </p:prevCondLst>
+              <p:nextCondLst>
+                <p:cond evt="onNext" delay="0">
+                  <p:tgtEl>
+                    <p:sldTgt/>
+                  </p:tgtEl>
+                </p:cond>
+              </p:nextCondLst>
+            </p:seq>
+          </p:childTnLst>
+        </p:cTn>
+      </p:par>
+    </p:tnLst>
+    <p:bldLst>
+      <p:bldP spid="3" grpId="0" uiExpand="1" build="p"/>
+    </p:bldLst>
+  </p:timing>
 </p:sld>
 </file>
 
@@ -4494,8 +4998,8 @@
           </a:p>
         </p:txBody>
       </p:sp>
-      <mc:AlternateContent xmlns:mc="http://schemas.openxmlformats.org/markup-compatibility/2006">
-        <mc:Choice xmlns:a14="http://schemas.microsoft.com/office/drawing/2010/main" Requires="a14">
+      <mc:AlternateContent xmlns:mc="http://schemas.openxmlformats.org/markup-compatibility/2006" xmlns:a14="http://schemas.microsoft.com/office/drawing/2010/main">
+        <mc:Choice Requires="a14">
           <p:sp>
             <p:nvSpPr>
               <p:cNvPr id="5" name="Inhaltsplatzhalter 4">
@@ -4562,7 +5066,7 @@
             </p:txBody>
           </p:sp>
         </mc:Choice>
-        <mc:Fallback>
+        <mc:Fallback xmlns="">
           <p:sp>
             <p:nvSpPr>
               <p:cNvPr id="5" name="Inhaltsplatzhalter 4">
@@ -4830,8 +5334,8 @@
           </a:p>
         </p:txBody>
       </p:sp>
-      <mc:AlternateContent xmlns:mc="http://schemas.openxmlformats.org/markup-compatibility/2006">
-        <mc:Choice xmlns:a14="http://schemas.microsoft.com/office/drawing/2010/main" Requires="a14">
+      <mc:AlternateContent xmlns:mc="http://schemas.openxmlformats.org/markup-compatibility/2006" xmlns:a14="http://schemas.microsoft.com/office/drawing/2010/main">
+        <mc:Choice Requires="a14">
           <p:sp>
             <p:nvSpPr>
               <p:cNvPr id="5" name="Inhaltsplatzhalter 4">
@@ -4884,7 +5388,7 @@
             </p:txBody>
           </p:sp>
         </mc:Choice>
-        <mc:Fallback>
+        <mc:Fallback xmlns="">
           <p:sp>
             <p:nvSpPr>
               <p:cNvPr id="5" name="Inhaltsplatzhalter 4">
@@ -4924,8 +5428,8 @@
           </p:sp>
         </mc:Fallback>
       </mc:AlternateContent>
-      <mc:AlternateContent xmlns:mc="http://schemas.openxmlformats.org/markup-compatibility/2006">
-        <mc:Choice xmlns:a14="http://schemas.microsoft.com/office/drawing/2010/main" Requires="a14">
+      <mc:AlternateContent xmlns:mc="http://schemas.openxmlformats.org/markup-compatibility/2006" xmlns:a14="http://schemas.microsoft.com/office/drawing/2010/main">
+        <mc:Choice Requires="a14">
           <p:sp>
             <p:nvSpPr>
               <p:cNvPr id="6" name="Inhaltsplatzhalter 5">
@@ -5001,7 +5505,7 @@
             </p:txBody>
           </p:sp>
         </mc:Choice>
-        <mc:Fallback>
+        <mc:Fallback xmlns="">
           <p:sp>
             <p:nvSpPr>
               <p:cNvPr id="6" name="Inhaltsplatzhalter 5">
@@ -5267,6 +5771,400 @@
   <p:clrMapOvr>
     <a:masterClrMapping/>
   </p:clrMapOvr>
+  <p:timing>
+    <p:tnLst>
+      <p:par>
+        <p:cTn id="1" dur="indefinite" restart="never" nodeType="tmRoot">
+          <p:childTnLst>
+            <p:seq concurrent="1" nextAc="seek">
+              <p:cTn id="2" dur="indefinite" nodeType="mainSeq">
+                <p:childTnLst>
+                  <p:par>
+                    <p:cTn id="3" fill="hold">
+                      <p:stCondLst>
+                        <p:cond delay="indefinite"/>
+                      </p:stCondLst>
+                      <p:childTnLst>
+                        <p:par>
+                          <p:cTn id="4" fill="hold">
+                            <p:stCondLst>
+                              <p:cond delay="0"/>
+                            </p:stCondLst>
+                            <p:childTnLst>
+                              <p:par>
+                                <p:cTn id="5" presetID="1" presetClass="entr" presetSubtype="0" fill="hold" nodeType="clickEffect">
+                                  <p:stCondLst>
+                                    <p:cond delay="0"/>
+                                  </p:stCondLst>
+                                  <p:childTnLst>
+                                    <p:set>
+                                      <p:cBhvr>
+                                        <p:cTn id="6" dur="1" fill="hold">
+                                          <p:stCondLst>
+                                            <p:cond delay="0"/>
+                                          </p:stCondLst>
+                                        </p:cTn>
+                                        <p:tgtEl>
+                                          <p:spTgt spid="8">
+                                            <p:txEl>
+                                              <p:pRg st="0" end="0"/>
+                                            </p:txEl>
+                                          </p:spTgt>
+                                        </p:tgtEl>
+                                        <p:attrNameLst>
+                                          <p:attrName>style.visibility</p:attrName>
+                                        </p:attrNameLst>
+                                      </p:cBhvr>
+                                      <p:to>
+                                        <p:strVal val="visible"/>
+                                      </p:to>
+                                    </p:set>
+                                  </p:childTnLst>
+                                </p:cTn>
+                              </p:par>
+                              <p:par>
+                                <p:cTn id="7" presetID="1" presetClass="entr" presetSubtype="0" fill="hold" nodeType="withEffect">
+                                  <p:stCondLst>
+                                    <p:cond delay="0"/>
+                                  </p:stCondLst>
+                                  <p:childTnLst>
+                                    <p:set>
+                                      <p:cBhvr>
+                                        <p:cTn id="8" dur="1" fill="hold">
+                                          <p:stCondLst>
+                                            <p:cond delay="0"/>
+                                          </p:stCondLst>
+                                        </p:cTn>
+                                        <p:tgtEl>
+                                          <p:spTgt spid="8">
+                                            <p:txEl>
+                                              <p:pRg st="1" end="1"/>
+                                            </p:txEl>
+                                          </p:spTgt>
+                                        </p:tgtEl>
+                                        <p:attrNameLst>
+                                          <p:attrName>style.visibility</p:attrName>
+                                        </p:attrNameLst>
+                                      </p:cBhvr>
+                                      <p:to>
+                                        <p:strVal val="visible"/>
+                                      </p:to>
+                                    </p:set>
+                                  </p:childTnLst>
+                                </p:cTn>
+                              </p:par>
+                              <p:par>
+                                <p:cTn id="9" presetID="1" presetClass="entr" presetSubtype="0" fill="hold" nodeType="withEffect">
+                                  <p:stCondLst>
+                                    <p:cond delay="0"/>
+                                  </p:stCondLst>
+                                  <p:childTnLst>
+                                    <p:set>
+                                      <p:cBhvr>
+                                        <p:cTn id="10" dur="1" fill="hold">
+                                          <p:stCondLst>
+                                            <p:cond delay="0"/>
+                                          </p:stCondLst>
+                                        </p:cTn>
+                                        <p:tgtEl>
+                                          <p:spTgt spid="8">
+                                            <p:txEl>
+                                              <p:pRg st="2" end="2"/>
+                                            </p:txEl>
+                                          </p:spTgt>
+                                        </p:tgtEl>
+                                        <p:attrNameLst>
+                                          <p:attrName>style.visibility</p:attrName>
+                                        </p:attrNameLst>
+                                      </p:cBhvr>
+                                      <p:to>
+                                        <p:strVal val="visible"/>
+                                      </p:to>
+                                    </p:set>
+                                  </p:childTnLst>
+                                </p:cTn>
+                              </p:par>
+                              <p:par>
+                                <p:cTn id="11" presetID="1" presetClass="entr" presetSubtype="0" fill="hold" nodeType="withEffect">
+                                  <p:stCondLst>
+                                    <p:cond delay="0"/>
+                                  </p:stCondLst>
+                                  <p:childTnLst>
+                                    <p:set>
+                                      <p:cBhvr>
+                                        <p:cTn id="12" dur="1" fill="hold">
+                                          <p:stCondLst>
+                                            <p:cond delay="0"/>
+                                          </p:stCondLst>
+                                        </p:cTn>
+                                        <p:tgtEl>
+                                          <p:spTgt spid="8">
+                                            <p:txEl>
+                                              <p:pRg st="3" end="3"/>
+                                            </p:txEl>
+                                          </p:spTgt>
+                                        </p:tgtEl>
+                                        <p:attrNameLst>
+                                          <p:attrName>style.visibility</p:attrName>
+                                        </p:attrNameLst>
+                                      </p:cBhvr>
+                                      <p:to>
+                                        <p:strVal val="visible"/>
+                                      </p:to>
+                                    </p:set>
+                                  </p:childTnLst>
+                                </p:cTn>
+                              </p:par>
+                              <p:par>
+                                <p:cTn id="13" presetID="1" presetClass="entr" presetSubtype="0" fill="hold" nodeType="withEffect">
+                                  <p:stCondLst>
+                                    <p:cond delay="0"/>
+                                  </p:stCondLst>
+                                  <p:childTnLst>
+                                    <p:set>
+                                      <p:cBhvr>
+                                        <p:cTn id="14" dur="1" fill="hold">
+                                          <p:stCondLst>
+                                            <p:cond delay="0"/>
+                                          </p:stCondLst>
+                                        </p:cTn>
+                                        <p:tgtEl>
+                                          <p:spTgt spid="8">
+                                            <p:txEl>
+                                              <p:pRg st="4" end="4"/>
+                                            </p:txEl>
+                                          </p:spTgt>
+                                        </p:tgtEl>
+                                        <p:attrNameLst>
+                                          <p:attrName>style.visibility</p:attrName>
+                                        </p:attrNameLst>
+                                      </p:cBhvr>
+                                      <p:to>
+                                        <p:strVal val="visible"/>
+                                      </p:to>
+                                    </p:set>
+                                  </p:childTnLst>
+                                </p:cTn>
+                              </p:par>
+                            </p:childTnLst>
+                          </p:cTn>
+                        </p:par>
+                      </p:childTnLst>
+                    </p:cTn>
+                  </p:par>
+                  <p:par>
+                    <p:cTn id="15" fill="hold">
+                      <p:stCondLst>
+                        <p:cond delay="indefinite"/>
+                      </p:stCondLst>
+                      <p:childTnLst>
+                        <p:par>
+                          <p:cTn id="16" fill="hold">
+                            <p:stCondLst>
+                              <p:cond delay="0"/>
+                            </p:stCondLst>
+                            <p:childTnLst>
+                              <p:par>
+                                <p:cTn id="17" presetID="1" presetClass="entr" presetSubtype="0" fill="hold" nodeType="clickEffect">
+                                  <p:stCondLst>
+                                    <p:cond delay="0"/>
+                                  </p:stCondLst>
+                                  <p:childTnLst>
+                                    <p:set>
+                                      <p:cBhvr>
+                                        <p:cTn id="18" dur="1" fill="hold">
+                                          <p:stCondLst>
+                                            <p:cond delay="0"/>
+                                          </p:stCondLst>
+                                        </p:cTn>
+                                        <p:tgtEl>
+                                          <p:spTgt spid="8">
+                                            <p:txEl>
+                                              <p:pRg st="5" end="5"/>
+                                            </p:txEl>
+                                          </p:spTgt>
+                                        </p:tgtEl>
+                                        <p:attrNameLst>
+                                          <p:attrName>style.visibility</p:attrName>
+                                        </p:attrNameLst>
+                                      </p:cBhvr>
+                                      <p:to>
+                                        <p:strVal val="visible"/>
+                                      </p:to>
+                                    </p:set>
+                                  </p:childTnLst>
+                                </p:cTn>
+                              </p:par>
+                              <p:par>
+                                <p:cTn id="19" presetID="1" presetClass="entr" presetSubtype="0" fill="hold" nodeType="withEffect">
+                                  <p:stCondLst>
+                                    <p:cond delay="0"/>
+                                  </p:stCondLst>
+                                  <p:childTnLst>
+                                    <p:set>
+                                      <p:cBhvr>
+                                        <p:cTn id="20" dur="1" fill="hold">
+                                          <p:stCondLst>
+                                            <p:cond delay="0"/>
+                                          </p:stCondLst>
+                                        </p:cTn>
+                                        <p:tgtEl>
+                                          <p:spTgt spid="8">
+                                            <p:txEl>
+                                              <p:pRg st="6" end="6"/>
+                                            </p:txEl>
+                                          </p:spTgt>
+                                        </p:tgtEl>
+                                        <p:attrNameLst>
+                                          <p:attrName>style.visibility</p:attrName>
+                                        </p:attrNameLst>
+                                      </p:cBhvr>
+                                      <p:to>
+                                        <p:strVal val="visible"/>
+                                      </p:to>
+                                    </p:set>
+                                  </p:childTnLst>
+                                </p:cTn>
+                              </p:par>
+                              <p:par>
+                                <p:cTn id="21" presetID="1" presetClass="entr" presetSubtype="0" fill="hold" nodeType="withEffect">
+                                  <p:stCondLst>
+                                    <p:cond delay="0"/>
+                                  </p:stCondLst>
+                                  <p:childTnLst>
+                                    <p:set>
+                                      <p:cBhvr>
+                                        <p:cTn id="22" dur="1" fill="hold">
+                                          <p:stCondLst>
+                                            <p:cond delay="0"/>
+                                          </p:stCondLst>
+                                        </p:cTn>
+                                        <p:tgtEl>
+                                          <p:spTgt spid="8">
+                                            <p:txEl>
+                                              <p:pRg st="7" end="7"/>
+                                            </p:txEl>
+                                          </p:spTgt>
+                                        </p:tgtEl>
+                                        <p:attrNameLst>
+                                          <p:attrName>style.visibility</p:attrName>
+                                        </p:attrNameLst>
+                                      </p:cBhvr>
+                                      <p:to>
+                                        <p:strVal val="visible"/>
+                                      </p:to>
+                                    </p:set>
+                                  </p:childTnLst>
+                                </p:cTn>
+                              </p:par>
+                              <p:par>
+                                <p:cTn id="23" presetID="1" presetClass="entr" presetSubtype="0" fill="hold" nodeType="withEffect">
+                                  <p:stCondLst>
+                                    <p:cond delay="0"/>
+                                  </p:stCondLst>
+                                  <p:childTnLst>
+                                    <p:set>
+                                      <p:cBhvr>
+                                        <p:cTn id="24" dur="1" fill="hold">
+                                          <p:stCondLst>
+                                            <p:cond delay="0"/>
+                                          </p:stCondLst>
+                                        </p:cTn>
+                                        <p:tgtEl>
+                                          <p:spTgt spid="8">
+                                            <p:txEl>
+                                              <p:pRg st="8" end="8"/>
+                                            </p:txEl>
+                                          </p:spTgt>
+                                        </p:tgtEl>
+                                        <p:attrNameLst>
+                                          <p:attrName>style.visibility</p:attrName>
+                                        </p:attrNameLst>
+                                      </p:cBhvr>
+                                      <p:to>
+                                        <p:strVal val="visible"/>
+                                      </p:to>
+                                    </p:set>
+                                  </p:childTnLst>
+                                </p:cTn>
+                              </p:par>
+                            </p:childTnLst>
+                          </p:cTn>
+                        </p:par>
+                      </p:childTnLst>
+                    </p:cTn>
+                  </p:par>
+                  <p:par>
+                    <p:cTn id="25" fill="hold">
+                      <p:stCondLst>
+                        <p:cond delay="indefinite"/>
+                      </p:stCondLst>
+                      <p:childTnLst>
+                        <p:par>
+                          <p:cTn id="26" fill="hold">
+                            <p:stCondLst>
+                              <p:cond delay="0"/>
+                            </p:stCondLst>
+                            <p:childTnLst>
+                              <p:par>
+                                <p:cTn id="27" presetID="1" presetClass="entr" presetSubtype="0" fill="hold" nodeType="clickEffect">
+                                  <p:stCondLst>
+                                    <p:cond delay="0"/>
+                                  </p:stCondLst>
+                                  <p:childTnLst>
+                                    <p:set>
+                                      <p:cBhvr>
+                                        <p:cTn id="28" dur="1" fill="hold">
+                                          <p:stCondLst>
+                                            <p:cond delay="0"/>
+                                          </p:stCondLst>
+                                        </p:cTn>
+                                        <p:tgtEl>
+                                          <p:spTgt spid="8">
+                                            <p:txEl>
+                                              <p:pRg st="9" end="9"/>
+                                            </p:txEl>
+                                          </p:spTgt>
+                                        </p:tgtEl>
+                                        <p:attrNameLst>
+                                          <p:attrName>style.visibility</p:attrName>
+                                        </p:attrNameLst>
+                                      </p:cBhvr>
+                                      <p:to>
+                                        <p:strVal val="visible"/>
+                                      </p:to>
+                                    </p:set>
+                                  </p:childTnLst>
+                                </p:cTn>
+                              </p:par>
+                            </p:childTnLst>
+                          </p:cTn>
+                        </p:par>
+                      </p:childTnLst>
+                    </p:cTn>
+                  </p:par>
+                </p:childTnLst>
+              </p:cTn>
+              <p:prevCondLst>
+                <p:cond evt="onPrev" delay="0">
+                  <p:tgtEl>
+                    <p:sldTgt/>
+                  </p:tgtEl>
+                </p:cond>
+              </p:prevCondLst>
+              <p:nextCondLst>
+                <p:cond evt="onNext" delay="0">
+                  <p:tgtEl>
+                    <p:sldTgt/>
+                  </p:tgtEl>
+                </p:cond>
+              </p:nextCondLst>
+            </p:seq>
+          </p:childTnLst>
+        </p:cTn>
+      </p:par>
+    </p:tnLst>
+  </p:timing>
 </p:sld>
 </file>
 
@@ -7431,8 +8329,8 @@
               <a:chExt cx="2628000" cy="1869840"/>
             </a:xfrm>
           </p:grpSpPr>
-          <mc:AlternateContent xmlns:mc="http://schemas.openxmlformats.org/markup-compatibility/2006">
-            <mc:Choice xmlns:p14="http://schemas.microsoft.com/office/powerpoint/2010/main" Requires="p14">
+          <mc:AlternateContent xmlns:mc="http://schemas.openxmlformats.org/markup-compatibility/2006" xmlns:p14="http://schemas.microsoft.com/office/powerpoint/2010/main">
+            <mc:Choice Requires="p14">
               <p:contentPart p14:bwMode="auto" r:id="rId2">
                 <p14:nvContentPartPr>
                   <p14:cNvPr id="5" name="Freihand 4">
@@ -7451,7 +8349,7 @@
                 </p14:xfrm>
               </p:contentPart>
             </mc:Choice>
-            <mc:Fallback>
+            <mc:Fallback xmlns="">
               <p:pic>
                 <p:nvPicPr>
                   <p:cNvPr id="5" name="Freihand 4">
@@ -7482,8 +8380,8 @@
               </p:pic>
             </mc:Fallback>
           </mc:AlternateContent>
-          <mc:AlternateContent xmlns:mc="http://schemas.openxmlformats.org/markup-compatibility/2006">
-            <mc:Choice xmlns:p14="http://schemas.microsoft.com/office/powerpoint/2010/main" Requires="p14">
+          <mc:AlternateContent xmlns:mc="http://schemas.openxmlformats.org/markup-compatibility/2006" xmlns:p14="http://schemas.microsoft.com/office/powerpoint/2010/main">
+            <mc:Choice Requires="p14">
               <p:contentPart p14:bwMode="auto" r:id="rId4">
                 <p14:nvContentPartPr>
                   <p14:cNvPr id="6" name="Freihand 5">
@@ -7502,7 +8400,7 @@
                 </p14:xfrm>
               </p:contentPart>
             </mc:Choice>
-            <mc:Fallback>
+            <mc:Fallback xmlns="">
               <p:pic>
                 <p:nvPicPr>
                   <p:cNvPr id="6" name="Freihand 5">
@@ -7534,8 +8432,8 @@
             </mc:Fallback>
           </mc:AlternateContent>
         </p:grpSp>
-        <mc:AlternateContent xmlns:mc="http://schemas.openxmlformats.org/markup-compatibility/2006">
-          <mc:Choice xmlns:p14="http://schemas.microsoft.com/office/powerpoint/2010/main" Requires="p14">
+        <mc:AlternateContent xmlns:mc="http://schemas.openxmlformats.org/markup-compatibility/2006" xmlns:p14="http://schemas.microsoft.com/office/powerpoint/2010/main">
+          <mc:Choice Requires="p14">
             <p:contentPart p14:bwMode="auto" r:id="rId6">
               <p14:nvContentPartPr>
                 <p14:cNvPr id="9" name="Freihand 8">
@@ -7554,7 +8452,7 @@
               </p14:xfrm>
             </p:contentPart>
           </mc:Choice>
-          <mc:Fallback>
+          <mc:Fallback xmlns="">
             <p:pic>
               <p:nvPicPr>
                 <p:cNvPr id="9" name="Freihand 8">
@@ -8837,6 +9735,364 @@
   <p:clrMapOvr>
     <a:masterClrMapping/>
   </p:clrMapOvr>
+  <p:timing>
+    <p:tnLst>
+      <p:par>
+        <p:cTn id="1" dur="indefinite" restart="never" nodeType="tmRoot">
+          <p:childTnLst>
+            <p:seq concurrent="1" nextAc="seek">
+              <p:cTn id="2" dur="indefinite" nodeType="mainSeq">
+                <p:childTnLst>
+                  <p:par>
+                    <p:cTn id="3" fill="hold">
+                      <p:stCondLst>
+                        <p:cond delay="indefinite"/>
+                      </p:stCondLst>
+                      <p:childTnLst>
+                        <p:par>
+                          <p:cTn id="4" fill="hold">
+                            <p:stCondLst>
+                              <p:cond delay="0"/>
+                            </p:stCondLst>
+                            <p:childTnLst>
+                              <p:par>
+                                <p:cTn id="5" presetID="1" presetClass="entr" presetSubtype="0" fill="hold" grpId="0" nodeType="clickEffect">
+                                  <p:stCondLst>
+                                    <p:cond delay="0"/>
+                                  </p:stCondLst>
+                                  <p:childTnLst>
+                                    <p:set>
+                                      <p:cBhvr>
+                                        <p:cTn id="6" dur="1" fill="hold">
+                                          <p:stCondLst>
+                                            <p:cond delay="0"/>
+                                          </p:stCondLst>
+                                        </p:cTn>
+                                        <p:tgtEl>
+                                          <p:spTgt spid="3">
+                                            <p:txEl>
+                                              <p:pRg st="0" end="0"/>
+                                            </p:txEl>
+                                          </p:spTgt>
+                                        </p:tgtEl>
+                                        <p:attrNameLst>
+                                          <p:attrName>style.visibility</p:attrName>
+                                        </p:attrNameLst>
+                                      </p:cBhvr>
+                                      <p:to>
+                                        <p:strVal val="visible"/>
+                                      </p:to>
+                                    </p:set>
+                                  </p:childTnLst>
+                                </p:cTn>
+                              </p:par>
+                              <p:par>
+                                <p:cTn id="7" presetID="1" presetClass="entr" presetSubtype="0" fill="hold" grpId="0" nodeType="withEffect">
+                                  <p:stCondLst>
+                                    <p:cond delay="0"/>
+                                  </p:stCondLst>
+                                  <p:childTnLst>
+                                    <p:set>
+                                      <p:cBhvr>
+                                        <p:cTn id="8" dur="1" fill="hold">
+                                          <p:stCondLst>
+                                            <p:cond delay="0"/>
+                                          </p:stCondLst>
+                                        </p:cTn>
+                                        <p:tgtEl>
+                                          <p:spTgt spid="3">
+                                            <p:txEl>
+                                              <p:pRg st="1" end="1"/>
+                                            </p:txEl>
+                                          </p:spTgt>
+                                        </p:tgtEl>
+                                        <p:attrNameLst>
+                                          <p:attrName>style.visibility</p:attrName>
+                                        </p:attrNameLst>
+                                      </p:cBhvr>
+                                      <p:to>
+                                        <p:strVal val="visible"/>
+                                      </p:to>
+                                    </p:set>
+                                  </p:childTnLst>
+                                </p:cTn>
+                              </p:par>
+                            </p:childTnLst>
+                          </p:cTn>
+                        </p:par>
+                      </p:childTnLst>
+                    </p:cTn>
+                  </p:par>
+                  <p:par>
+                    <p:cTn id="9" fill="hold">
+                      <p:stCondLst>
+                        <p:cond delay="indefinite"/>
+                      </p:stCondLst>
+                      <p:childTnLst>
+                        <p:par>
+                          <p:cTn id="10" fill="hold">
+                            <p:stCondLst>
+                              <p:cond delay="0"/>
+                            </p:stCondLst>
+                            <p:childTnLst>
+                              <p:par>
+                                <p:cTn id="11" presetID="1" presetClass="entr" presetSubtype="0" fill="hold" grpId="0" nodeType="clickEffect">
+                                  <p:stCondLst>
+                                    <p:cond delay="0"/>
+                                  </p:stCondLst>
+                                  <p:childTnLst>
+                                    <p:set>
+                                      <p:cBhvr>
+                                        <p:cTn id="12" dur="1" fill="hold">
+                                          <p:stCondLst>
+                                            <p:cond delay="0"/>
+                                          </p:stCondLst>
+                                        </p:cTn>
+                                        <p:tgtEl>
+                                          <p:spTgt spid="3">
+                                            <p:txEl>
+                                              <p:pRg st="2" end="2"/>
+                                            </p:txEl>
+                                          </p:spTgt>
+                                        </p:tgtEl>
+                                        <p:attrNameLst>
+                                          <p:attrName>style.visibility</p:attrName>
+                                        </p:attrNameLst>
+                                      </p:cBhvr>
+                                      <p:to>
+                                        <p:strVal val="visible"/>
+                                      </p:to>
+                                    </p:set>
+                                  </p:childTnLst>
+                                </p:cTn>
+                              </p:par>
+                            </p:childTnLst>
+                          </p:cTn>
+                        </p:par>
+                      </p:childTnLst>
+                    </p:cTn>
+                  </p:par>
+                  <p:par>
+                    <p:cTn id="13" fill="hold">
+                      <p:stCondLst>
+                        <p:cond delay="indefinite"/>
+                      </p:stCondLst>
+                      <p:childTnLst>
+                        <p:par>
+                          <p:cTn id="14" fill="hold">
+                            <p:stCondLst>
+                              <p:cond delay="0"/>
+                            </p:stCondLst>
+                            <p:childTnLst>
+                              <p:par>
+                                <p:cTn id="15" presetID="1" presetClass="entr" presetSubtype="0" fill="hold" grpId="0" nodeType="clickEffect">
+                                  <p:stCondLst>
+                                    <p:cond delay="0"/>
+                                  </p:stCondLst>
+                                  <p:childTnLst>
+                                    <p:set>
+                                      <p:cBhvr>
+                                        <p:cTn id="16" dur="1" fill="hold">
+                                          <p:stCondLst>
+                                            <p:cond delay="0"/>
+                                          </p:stCondLst>
+                                        </p:cTn>
+                                        <p:tgtEl>
+                                          <p:spTgt spid="3">
+                                            <p:txEl>
+                                              <p:pRg st="3" end="3"/>
+                                            </p:txEl>
+                                          </p:spTgt>
+                                        </p:tgtEl>
+                                        <p:attrNameLst>
+                                          <p:attrName>style.visibility</p:attrName>
+                                        </p:attrNameLst>
+                                      </p:cBhvr>
+                                      <p:to>
+                                        <p:strVal val="visible"/>
+                                      </p:to>
+                                    </p:set>
+                                  </p:childTnLst>
+                                </p:cTn>
+                              </p:par>
+                            </p:childTnLst>
+                          </p:cTn>
+                        </p:par>
+                      </p:childTnLst>
+                    </p:cTn>
+                  </p:par>
+                  <p:par>
+                    <p:cTn id="17" fill="hold">
+                      <p:stCondLst>
+                        <p:cond delay="indefinite"/>
+                      </p:stCondLst>
+                      <p:childTnLst>
+                        <p:par>
+                          <p:cTn id="18" fill="hold">
+                            <p:stCondLst>
+                              <p:cond delay="0"/>
+                            </p:stCondLst>
+                            <p:childTnLst>
+                              <p:par>
+                                <p:cTn id="19" presetID="1" presetClass="entr" presetSubtype="0" fill="hold" grpId="0" nodeType="clickEffect">
+                                  <p:stCondLst>
+                                    <p:cond delay="0"/>
+                                  </p:stCondLst>
+                                  <p:childTnLst>
+                                    <p:set>
+                                      <p:cBhvr>
+                                        <p:cTn id="20" dur="1" fill="hold">
+                                          <p:stCondLst>
+                                            <p:cond delay="0"/>
+                                          </p:stCondLst>
+                                        </p:cTn>
+                                        <p:tgtEl>
+                                          <p:spTgt spid="3">
+                                            <p:txEl>
+                                              <p:pRg st="4" end="4"/>
+                                            </p:txEl>
+                                          </p:spTgt>
+                                        </p:tgtEl>
+                                        <p:attrNameLst>
+                                          <p:attrName>style.visibility</p:attrName>
+                                        </p:attrNameLst>
+                                      </p:cBhvr>
+                                      <p:to>
+                                        <p:strVal val="visible"/>
+                                      </p:to>
+                                    </p:set>
+                                  </p:childTnLst>
+                                </p:cTn>
+                              </p:par>
+                            </p:childTnLst>
+                          </p:cTn>
+                        </p:par>
+                      </p:childTnLst>
+                    </p:cTn>
+                  </p:par>
+                  <p:par>
+                    <p:cTn id="21" fill="hold">
+                      <p:stCondLst>
+                        <p:cond delay="indefinite"/>
+                      </p:stCondLst>
+                      <p:childTnLst>
+                        <p:par>
+                          <p:cTn id="22" fill="hold">
+                            <p:stCondLst>
+                              <p:cond delay="0"/>
+                            </p:stCondLst>
+                            <p:childTnLst>
+                              <p:par>
+                                <p:cTn id="23" presetID="1" presetClass="entr" presetSubtype="0" fill="hold" grpId="0" nodeType="clickEffect">
+                                  <p:stCondLst>
+                                    <p:cond delay="0"/>
+                                  </p:stCondLst>
+                                  <p:childTnLst>
+                                    <p:set>
+                                      <p:cBhvr>
+                                        <p:cTn id="24" dur="1" fill="hold">
+                                          <p:stCondLst>
+                                            <p:cond delay="0"/>
+                                          </p:stCondLst>
+                                        </p:cTn>
+                                        <p:tgtEl>
+                                          <p:spTgt spid="3">
+                                            <p:txEl>
+                                              <p:pRg st="5" end="5"/>
+                                            </p:txEl>
+                                          </p:spTgt>
+                                        </p:tgtEl>
+                                        <p:attrNameLst>
+                                          <p:attrName>style.visibility</p:attrName>
+                                        </p:attrNameLst>
+                                      </p:cBhvr>
+                                      <p:to>
+                                        <p:strVal val="visible"/>
+                                      </p:to>
+                                    </p:set>
+                                  </p:childTnLst>
+                                </p:cTn>
+                              </p:par>
+                            </p:childTnLst>
+                          </p:cTn>
+                        </p:par>
+                      </p:childTnLst>
+                    </p:cTn>
+                  </p:par>
+                  <p:par>
+                    <p:cTn id="25" fill="hold">
+                      <p:stCondLst>
+                        <p:cond delay="indefinite"/>
+                      </p:stCondLst>
+                      <p:childTnLst>
+                        <p:par>
+                          <p:cTn id="26" fill="hold">
+                            <p:stCondLst>
+                              <p:cond delay="0"/>
+                            </p:stCondLst>
+                            <p:childTnLst>
+                              <p:par>
+                                <p:cTn id="27" presetID="1" presetClass="entr" presetSubtype="0" fill="hold" grpId="0" nodeType="clickEffect">
+                                  <p:stCondLst>
+                                    <p:cond delay="0"/>
+                                  </p:stCondLst>
+                                  <p:childTnLst>
+                                    <p:set>
+                                      <p:cBhvr>
+                                        <p:cTn id="28" dur="1" fill="hold">
+                                          <p:stCondLst>
+                                            <p:cond delay="0"/>
+                                          </p:stCondLst>
+                                        </p:cTn>
+                                        <p:tgtEl>
+                                          <p:spTgt spid="3">
+                                            <p:txEl>
+                                              <p:pRg st="7" end="7"/>
+                                            </p:txEl>
+                                          </p:spTgt>
+                                        </p:tgtEl>
+                                        <p:attrNameLst>
+                                          <p:attrName>style.visibility</p:attrName>
+                                        </p:attrNameLst>
+                                      </p:cBhvr>
+                                      <p:to>
+                                        <p:strVal val="visible"/>
+                                      </p:to>
+                                    </p:set>
+                                  </p:childTnLst>
+                                </p:cTn>
+                              </p:par>
+                            </p:childTnLst>
+                          </p:cTn>
+                        </p:par>
+                      </p:childTnLst>
+                    </p:cTn>
+                  </p:par>
+                </p:childTnLst>
+              </p:cTn>
+              <p:prevCondLst>
+                <p:cond evt="onPrev" delay="0">
+                  <p:tgtEl>
+                    <p:sldTgt/>
+                  </p:tgtEl>
+                </p:cond>
+              </p:prevCondLst>
+              <p:nextCondLst>
+                <p:cond evt="onNext" delay="0">
+                  <p:tgtEl>
+                    <p:sldTgt/>
+                  </p:tgtEl>
+                </p:cond>
+              </p:nextCondLst>
+            </p:seq>
+          </p:childTnLst>
+        </p:cTn>
+      </p:par>
+    </p:tnLst>
+    <p:bldLst>
+      <p:bldP spid="3" grpId="0" uiExpand="1" build="p"/>
+    </p:bldLst>
+  </p:timing>
 </p:sld>
 </file>
 
@@ -9613,6 +10869,431 @@
   <p:clrMapOvr>
     <a:masterClrMapping/>
   </p:clrMapOvr>
+  <p:timing>
+    <p:tnLst>
+      <p:par>
+        <p:cTn id="1" dur="indefinite" restart="never" nodeType="tmRoot">
+          <p:childTnLst>
+            <p:seq concurrent="1" nextAc="seek">
+              <p:cTn id="2" dur="indefinite" nodeType="mainSeq">
+                <p:childTnLst>
+                  <p:par>
+                    <p:cTn id="3" fill="hold">
+                      <p:stCondLst>
+                        <p:cond delay="indefinite"/>
+                      </p:stCondLst>
+                      <p:childTnLst>
+                        <p:par>
+                          <p:cTn id="4" fill="hold">
+                            <p:stCondLst>
+                              <p:cond delay="0"/>
+                            </p:stCondLst>
+                            <p:childTnLst>
+                              <p:par>
+                                <p:cTn id="5" presetID="1" presetClass="entr" presetSubtype="0" fill="hold" grpId="0" nodeType="clickEffect">
+                                  <p:stCondLst>
+                                    <p:cond delay="0"/>
+                                  </p:stCondLst>
+                                  <p:childTnLst>
+                                    <p:set>
+                                      <p:cBhvr>
+                                        <p:cTn id="6" dur="1" fill="hold">
+                                          <p:stCondLst>
+                                            <p:cond delay="0"/>
+                                          </p:stCondLst>
+                                        </p:cTn>
+                                        <p:tgtEl>
+                                          <p:spTgt spid="3">
+                                            <p:txEl>
+                                              <p:pRg st="0" end="0"/>
+                                            </p:txEl>
+                                          </p:spTgt>
+                                        </p:tgtEl>
+                                        <p:attrNameLst>
+                                          <p:attrName>style.visibility</p:attrName>
+                                        </p:attrNameLst>
+                                      </p:cBhvr>
+                                      <p:to>
+                                        <p:strVal val="visible"/>
+                                      </p:to>
+                                    </p:set>
+                                  </p:childTnLst>
+                                </p:cTn>
+                              </p:par>
+                            </p:childTnLst>
+                          </p:cTn>
+                        </p:par>
+                      </p:childTnLst>
+                    </p:cTn>
+                  </p:par>
+                  <p:par>
+                    <p:cTn id="7" fill="hold">
+                      <p:stCondLst>
+                        <p:cond delay="indefinite"/>
+                      </p:stCondLst>
+                      <p:childTnLst>
+                        <p:par>
+                          <p:cTn id="8" fill="hold">
+                            <p:stCondLst>
+                              <p:cond delay="0"/>
+                            </p:stCondLst>
+                            <p:childTnLst>
+                              <p:par>
+                                <p:cTn id="9" presetID="1" presetClass="entr" presetSubtype="0" fill="hold" grpId="0" nodeType="clickEffect">
+                                  <p:stCondLst>
+                                    <p:cond delay="0"/>
+                                  </p:stCondLst>
+                                  <p:childTnLst>
+                                    <p:set>
+                                      <p:cBhvr>
+                                        <p:cTn id="10" dur="1" fill="hold">
+                                          <p:stCondLst>
+                                            <p:cond delay="0"/>
+                                          </p:stCondLst>
+                                        </p:cTn>
+                                        <p:tgtEl>
+                                          <p:spTgt spid="3">
+                                            <p:txEl>
+                                              <p:pRg st="1" end="1"/>
+                                            </p:txEl>
+                                          </p:spTgt>
+                                        </p:tgtEl>
+                                        <p:attrNameLst>
+                                          <p:attrName>style.visibility</p:attrName>
+                                        </p:attrNameLst>
+                                      </p:cBhvr>
+                                      <p:to>
+                                        <p:strVal val="visible"/>
+                                      </p:to>
+                                    </p:set>
+                                  </p:childTnLst>
+                                </p:cTn>
+                              </p:par>
+                            </p:childTnLst>
+                          </p:cTn>
+                        </p:par>
+                      </p:childTnLst>
+                    </p:cTn>
+                  </p:par>
+                  <p:par>
+                    <p:cTn id="11" fill="hold">
+                      <p:stCondLst>
+                        <p:cond delay="indefinite"/>
+                      </p:stCondLst>
+                      <p:childTnLst>
+                        <p:par>
+                          <p:cTn id="12" fill="hold">
+                            <p:stCondLst>
+                              <p:cond delay="0"/>
+                            </p:stCondLst>
+                            <p:childTnLst>
+                              <p:par>
+                                <p:cTn id="13" presetID="1" presetClass="entr" presetSubtype="0" fill="hold" grpId="0" nodeType="clickEffect">
+                                  <p:stCondLst>
+                                    <p:cond delay="0"/>
+                                  </p:stCondLst>
+                                  <p:childTnLst>
+                                    <p:set>
+                                      <p:cBhvr>
+                                        <p:cTn id="14" dur="1" fill="hold">
+                                          <p:stCondLst>
+                                            <p:cond delay="0"/>
+                                          </p:stCondLst>
+                                        </p:cTn>
+                                        <p:tgtEl>
+                                          <p:spTgt spid="3">
+                                            <p:txEl>
+                                              <p:pRg st="2" end="2"/>
+                                            </p:txEl>
+                                          </p:spTgt>
+                                        </p:tgtEl>
+                                        <p:attrNameLst>
+                                          <p:attrName>style.visibility</p:attrName>
+                                        </p:attrNameLst>
+                                      </p:cBhvr>
+                                      <p:to>
+                                        <p:strVal val="visible"/>
+                                      </p:to>
+                                    </p:set>
+                                  </p:childTnLst>
+                                </p:cTn>
+                              </p:par>
+                            </p:childTnLst>
+                          </p:cTn>
+                        </p:par>
+                      </p:childTnLst>
+                    </p:cTn>
+                  </p:par>
+                  <p:par>
+                    <p:cTn id="15" fill="hold">
+                      <p:stCondLst>
+                        <p:cond delay="indefinite"/>
+                      </p:stCondLst>
+                      <p:childTnLst>
+                        <p:par>
+                          <p:cTn id="16" fill="hold">
+                            <p:stCondLst>
+                              <p:cond delay="0"/>
+                            </p:stCondLst>
+                            <p:childTnLst>
+                              <p:par>
+                                <p:cTn id="17" presetID="1" presetClass="entr" presetSubtype="0" fill="hold" grpId="0" nodeType="clickEffect">
+                                  <p:stCondLst>
+                                    <p:cond delay="0"/>
+                                  </p:stCondLst>
+                                  <p:childTnLst>
+                                    <p:set>
+                                      <p:cBhvr>
+                                        <p:cTn id="18" dur="1" fill="hold">
+                                          <p:stCondLst>
+                                            <p:cond delay="0"/>
+                                          </p:stCondLst>
+                                        </p:cTn>
+                                        <p:tgtEl>
+                                          <p:spTgt spid="3">
+                                            <p:txEl>
+                                              <p:pRg st="3" end="3"/>
+                                            </p:txEl>
+                                          </p:spTgt>
+                                        </p:tgtEl>
+                                        <p:attrNameLst>
+                                          <p:attrName>style.visibility</p:attrName>
+                                        </p:attrNameLst>
+                                      </p:cBhvr>
+                                      <p:to>
+                                        <p:strVal val="visible"/>
+                                      </p:to>
+                                    </p:set>
+                                  </p:childTnLst>
+                                </p:cTn>
+                              </p:par>
+                            </p:childTnLst>
+                          </p:cTn>
+                        </p:par>
+                      </p:childTnLst>
+                    </p:cTn>
+                  </p:par>
+                  <p:par>
+                    <p:cTn id="19" fill="hold">
+                      <p:stCondLst>
+                        <p:cond delay="indefinite"/>
+                      </p:stCondLst>
+                      <p:childTnLst>
+                        <p:par>
+                          <p:cTn id="20" fill="hold">
+                            <p:stCondLst>
+                              <p:cond delay="0"/>
+                            </p:stCondLst>
+                            <p:childTnLst>
+                              <p:par>
+                                <p:cTn id="21" presetID="1" presetClass="entr" presetSubtype="0" fill="hold" grpId="0" nodeType="clickEffect">
+                                  <p:stCondLst>
+                                    <p:cond delay="0"/>
+                                  </p:stCondLst>
+                                  <p:childTnLst>
+                                    <p:set>
+                                      <p:cBhvr>
+                                        <p:cTn id="22" dur="1" fill="hold">
+                                          <p:stCondLst>
+                                            <p:cond delay="0"/>
+                                          </p:stCondLst>
+                                        </p:cTn>
+                                        <p:tgtEl>
+                                          <p:spTgt spid="3">
+                                            <p:txEl>
+                                              <p:pRg st="4" end="4"/>
+                                            </p:txEl>
+                                          </p:spTgt>
+                                        </p:tgtEl>
+                                        <p:attrNameLst>
+                                          <p:attrName>style.visibility</p:attrName>
+                                        </p:attrNameLst>
+                                      </p:cBhvr>
+                                      <p:to>
+                                        <p:strVal val="visible"/>
+                                      </p:to>
+                                    </p:set>
+                                  </p:childTnLst>
+                                </p:cTn>
+                              </p:par>
+                            </p:childTnLst>
+                          </p:cTn>
+                        </p:par>
+                      </p:childTnLst>
+                    </p:cTn>
+                  </p:par>
+                  <p:par>
+                    <p:cTn id="23" fill="hold">
+                      <p:stCondLst>
+                        <p:cond delay="indefinite"/>
+                      </p:stCondLst>
+                      <p:childTnLst>
+                        <p:par>
+                          <p:cTn id="24" fill="hold">
+                            <p:stCondLst>
+                              <p:cond delay="0"/>
+                            </p:stCondLst>
+                            <p:childTnLst>
+                              <p:par>
+                                <p:cTn id="25" presetID="1" presetClass="entr" presetSubtype="0" fill="hold" grpId="0" nodeType="clickEffect">
+                                  <p:stCondLst>
+                                    <p:cond delay="0"/>
+                                  </p:stCondLst>
+                                  <p:childTnLst>
+                                    <p:set>
+                                      <p:cBhvr>
+                                        <p:cTn id="26" dur="1" fill="hold">
+                                          <p:stCondLst>
+                                            <p:cond delay="0"/>
+                                          </p:stCondLst>
+                                        </p:cTn>
+                                        <p:tgtEl>
+                                          <p:spTgt spid="3">
+                                            <p:txEl>
+                                              <p:pRg st="5" end="5"/>
+                                            </p:txEl>
+                                          </p:spTgt>
+                                        </p:tgtEl>
+                                        <p:attrNameLst>
+                                          <p:attrName>style.visibility</p:attrName>
+                                        </p:attrNameLst>
+                                      </p:cBhvr>
+                                      <p:to>
+                                        <p:strVal val="visible"/>
+                                      </p:to>
+                                    </p:set>
+                                  </p:childTnLst>
+                                </p:cTn>
+                              </p:par>
+                            </p:childTnLst>
+                          </p:cTn>
+                        </p:par>
+                      </p:childTnLst>
+                    </p:cTn>
+                  </p:par>
+                  <p:par>
+                    <p:cTn id="27" fill="hold">
+                      <p:stCondLst>
+                        <p:cond delay="indefinite"/>
+                      </p:stCondLst>
+                      <p:childTnLst>
+                        <p:par>
+                          <p:cTn id="28" fill="hold">
+                            <p:stCondLst>
+                              <p:cond delay="0"/>
+                            </p:stCondLst>
+                            <p:childTnLst>
+                              <p:par>
+                                <p:cTn id="29" presetID="1" presetClass="entr" presetSubtype="0" fill="hold" grpId="0" nodeType="clickEffect">
+                                  <p:stCondLst>
+                                    <p:cond delay="0"/>
+                                  </p:stCondLst>
+                                  <p:childTnLst>
+                                    <p:set>
+                                      <p:cBhvr>
+                                        <p:cTn id="30" dur="1" fill="hold">
+                                          <p:stCondLst>
+                                            <p:cond delay="0"/>
+                                          </p:stCondLst>
+                                        </p:cTn>
+                                        <p:tgtEl>
+                                          <p:spTgt spid="3">
+                                            <p:txEl>
+                                              <p:pRg st="6" end="6"/>
+                                            </p:txEl>
+                                          </p:spTgt>
+                                        </p:tgtEl>
+                                        <p:attrNameLst>
+                                          <p:attrName>style.visibility</p:attrName>
+                                        </p:attrNameLst>
+                                      </p:cBhvr>
+                                      <p:to>
+                                        <p:strVal val="visible"/>
+                                      </p:to>
+                                    </p:set>
+                                  </p:childTnLst>
+                                </p:cTn>
+                              </p:par>
+                            </p:childTnLst>
+                          </p:cTn>
+                        </p:par>
+                      </p:childTnLst>
+                    </p:cTn>
+                  </p:par>
+                  <p:par>
+                    <p:cTn id="31" fill="hold">
+                      <p:stCondLst>
+                        <p:cond delay="indefinite"/>
+                      </p:stCondLst>
+                      <p:childTnLst>
+                        <p:par>
+                          <p:cTn id="32" fill="hold">
+                            <p:stCondLst>
+                              <p:cond delay="0"/>
+                            </p:stCondLst>
+                            <p:childTnLst>
+                              <p:par>
+                                <p:cTn id="33" presetID="1" presetClass="entr" presetSubtype="0" fill="hold" grpId="0" nodeType="clickEffect">
+                                  <p:stCondLst>
+                                    <p:cond delay="0"/>
+                                  </p:stCondLst>
+                                  <p:childTnLst>
+                                    <p:set>
+                                      <p:cBhvr>
+                                        <p:cTn id="34" dur="1" fill="hold">
+                                          <p:stCondLst>
+                                            <p:cond delay="0"/>
+                                          </p:stCondLst>
+                                        </p:cTn>
+                                        <p:tgtEl>
+                                          <p:spTgt spid="3">
+                                            <p:txEl>
+                                              <p:pRg st="7" end="7"/>
+                                            </p:txEl>
+                                          </p:spTgt>
+                                        </p:tgtEl>
+                                        <p:attrNameLst>
+                                          <p:attrName>style.visibility</p:attrName>
+                                        </p:attrNameLst>
+                                      </p:cBhvr>
+                                      <p:to>
+                                        <p:strVal val="visible"/>
+                                      </p:to>
+                                    </p:set>
+                                  </p:childTnLst>
+                                </p:cTn>
+                              </p:par>
+                            </p:childTnLst>
+                          </p:cTn>
+                        </p:par>
+                      </p:childTnLst>
+                    </p:cTn>
+                  </p:par>
+                </p:childTnLst>
+              </p:cTn>
+              <p:prevCondLst>
+                <p:cond evt="onPrev" delay="0">
+                  <p:tgtEl>
+                    <p:sldTgt/>
+                  </p:tgtEl>
+                </p:cond>
+              </p:prevCondLst>
+              <p:nextCondLst>
+                <p:cond evt="onNext" delay="0">
+                  <p:tgtEl>
+                    <p:sldTgt/>
+                  </p:tgtEl>
+                </p:cond>
+              </p:nextCondLst>
+            </p:seq>
+          </p:childTnLst>
+        </p:cTn>
+      </p:par>
+    </p:tnLst>
+    <p:bldLst>
+      <p:bldP spid="3" grpId="0" build="p"/>
+    </p:bldLst>
+  </p:timing>
 </p:sld>
 </file>
 
@@ -13242,6 +14923,13 @@
               <a:t>Values close to 0 indicate a normal distribution</a:t>
             </a:r>
           </a:p>
+          <a:p>
+            <a:r>
+              <a:rPr lang="en-GB"/>
+              <a:t>One example in R</a:t>
+            </a:r>
+            <a:endParaRPr lang="en-GB" dirty="0"/>
+          </a:p>
         </p:txBody>
       </p:sp>
       <p:pic>
@@ -13610,6 +15298,55 @@
                                           <p:spTgt spid="3">
                                             <p:txEl>
                                               <p:pRg st="4" end="4"/>
+                                            </p:txEl>
+                                          </p:spTgt>
+                                        </p:tgtEl>
+                                        <p:attrNameLst>
+                                          <p:attrName>style.visibility</p:attrName>
+                                        </p:attrNameLst>
+                                      </p:cBhvr>
+                                      <p:to>
+                                        <p:strVal val="visible"/>
+                                      </p:to>
+                                    </p:set>
+                                  </p:childTnLst>
+                                </p:cTn>
+                              </p:par>
+                            </p:childTnLst>
+                          </p:cTn>
+                        </p:par>
+                      </p:childTnLst>
+                    </p:cTn>
+                  </p:par>
+                  <p:par>
+                    <p:cTn id="23" fill="hold">
+                      <p:stCondLst>
+                        <p:cond delay="indefinite"/>
+                      </p:stCondLst>
+                      <p:childTnLst>
+                        <p:par>
+                          <p:cTn id="24" fill="hold">
+                            <p:stCondLst>
+                              <p:cond delay="0"/>
+                            </p:stCondLst>
+                            <p:childTnLst>
+                              <p:par>
+                                <p:cTn id="25" presetID="1" presetClass="entr" presetSubtype="0" fill="hold" nodeType="clickEffect">
+                                  <p:stCondLst>
+                                    <p:cond delay="0"/>
+                                  </p:stCondLst>
+                                  <p:childTnLst>
+                                    <p:set>
+                                      <p:cBhvr>
+                                        <p:cTn id="26" dur="1" fill="hold">
+                                          <p:stCondLst>
+                                            <p:cond delay="0"/>
+                                          </p:stCondLst>
+                                        </p:cTn>
+                                        <p:tgtEl>
+                                          <p:spTgt spid="3">
+                                            <p:txEl>
+                                              <p:pRg st="5" end="5"/>
                                             </p:txEl>
                                           </p:spTgt>
                                         </p:tgtEl>
